--- a/public/fun/cards/finance/finance-32.pptx
+++ b/public/fun/cards/finance/finance-32.pptx
@@ -3085,7 +3085,7 @@
     <p:bg>
       <p:bgPr>
         <a:solidFill>
-          <a:srgbClr val="715214"/>
+          <a:srgbClr val="0E1116"/>
         </a:solidFill>
         <a:effectLst/>
       </p:bgPr>
@@ -3099,14 +3099,43 @@
       <p:grpSpPr/>
       <p:sp>
         <p:nvSpPr>
-          <p:cNvPr id="2" name="텍스트"/>
+          <p:cNvPr id="2" name="Rectangle 1"/>
+          <p:cNvSpPr/>
+          <p:nvPr/>
+        </p:nvSpPr>
+        <p:spPr>
+          <a:xfrm>
+            <a:off x="252000" y="144000"/>
+            <a:ext cx="201600" cy="21600"/>
+          </a:xfrm>
+          <a:prstGeom prst="rect">
+            <a:avLst/>
+          </a:prstGeom>
+          <a:solidFill>
+            <a:srgbClr val="985BF7"/>
+          </a:solidFill>
+          <a:ln>
+            <a:noFill/>
+          </a:ln>
+        </p:spPr>
+        <p:txBody>
+          <a:bodyPr rtlCol="0" anchor="ctr"/>
+          <a:lstStyle/>
+          <a:p>
+            <a:pPr algn="ctr"/>
+          </a:p>
+        </p:txBody>
+      </p:sp>
+      <p:sp>
+        <p:nvSpPr>
+          <p:cNvPr id="3" name="텍스트"/>
           <p:cNvSpPr txBox="1"/>
           <p:nvPr/>
         </p:nvSpPr>
         <p:spPr>
           <a:xfrm>
-            <a:off x="360000" y="201600"/>
-            <a:ext cx="2520000" cy="100800"/>
+            <a:off x="252000" y="273600"/>
+            <a:ext cx="2160000" cy="360000"/>
           </a:xfrm>
           <a:prstGeom prst="rect">
             <a:avLst/>
@@ -3119,158 +3148,13 @@
           </a:bodyPr>
           <a:lstStyle/>
           <a:p>
-            <a:pPr algn="ctr">
+            <a:pPr algn="l">
               <a:lnSpc>
-                <a:spcPts val="1015"/>
+                <a:spcPts val="3190"/>
               </a:lnSpc>
             </a:pPr>
             <a:r>
-              <a:rPr sz="700" b="1" spc="300">
-                <a:solidFill>
-                  <a:srgbClr val="D7CEBD"/>
-                </a:solidFill>
-                <a:latin typeface="맑은 고딕"/>
-                <a:ea typeface="맑은 고딕"/>
-              </a:rPr>
-              <a:t>회사 · 사무소 이름</a:t>
-            </a:r>
-          </a:p>
-        </p:txBody>
-      </p:sp>
-      <p:sp>
-        <p:nvSpPr>
-          <p:cNvPr id="3" name="Freeform 2"/>
-          <p:cNvSpPr/>
-          <p:nvPr/>
-        </p:nvSpPr>
-        <p:spPr>
-          <a:xfrm>
-            <a:off x="1520640" y="413280"/>
-            <a:ext cx="198720" cy="90720"/>
-          </a:xfrm>
-          <a:custGeom>
-            <a:avLst/>
-            <a:gdLst/>
-            <a:ahLst/>
-            <a:cxnLst/>
-            <a:rect l="l" t="t" r="r" b="b"/>
-            <a:pathLst>
-              <a:path w="198720" h="90720">
-                <a:moveTo>
-                  <a:pt x="0" y="90720"/>
-                </a:moveTo>
-                <a:lnTo>
-                  <a:pt x="99360" y="0"/>
-                </a:lnTo>
-                <a:lnTo>
-                  <a:pt x="198720" y="90720"/>
-                </a:lnTo>
-                <a:close/>
-              </a:path>
-            </a:pathLst>
-          </a:custGeom>
-          <a:solidFill>
-            <a:srgbClr val="D7B061"/>
-          </a:solidFill>
-          <a:ln>
-            <a:noFill/>
-          </a:ln>
-        </p:spPr>
-        <p:txBody>
-          <a:bodyPr rtlCol="0" anchor="ctr"/>
-          <a:lstStyle/>
-          <a:p>
-            <a:pPr algn="ctr"/>
-          </a:p>
-        </p:txBody>
-      </p:sp>
-      <p:sp>
-        <p:nvSpPr>
-          <p:cNvPr id="4" name="Rectangle 3"/>
-          <p:cNvSpPr/>
-          <p:nvPr/>
-        </p:nvSpPr>
-        <p:spPr>
-          <a:xfrm>
-            <a:off x="1550880" y="504000"/>
-            <a:ext cx="138240" cy="90720"/>
-          </a:xfrm>
-          <a:prstGeom prst="rect">
-            <a:avLst/>
-          </a:prstGeom>
-          <a:solidFill>
-            <a:srgbClr val="886E3A"/>
-          </a:solidFill>
-          <a:ln>
-            <a:noFill/>
-          </a:ln>
-        </p:spPr>
-        <p:txBody>
-          <a:bodyPr rtlCol="0" anchor="ctr"/>
-          <a:lstStyle/>
-          <a:p>
-            <a:pPr algn="ctr"/>
-          </a:p>
-        </p:txBody>
-      </p:sp>
-      <p:sp>
-        <p:nvSpPr>
-          <p:cNvPr id="5" name="Rectangle 4"/>
-          <p:cNvSpPr/>
-          <p:nvPr/>
-        </p:nvSpPr>
-        <p:spPr>
-          <a:xfrm>
-            <a:off x="1602720" y="534240"/>
-            <a:ext cx="34560" cy="60480"/>
-          </a:xfrm>
-          <a:prstGeom prst="rect">
-            <a:avLst/>
-          </a:prstGeom>
-          <a:solidFill>
-            <a:srgbClr val="D7B061"/>
-          </a:solidFill>
-          <a:ln>
-            <a:noFill/>
-          </a:ln>
-        </p:spPr>
-        <p:txBody>
-          <a:bodyPr rtlCol="0" anchor="ctr"/>
-          <a:lstStyle/>
-          <a:p>
-            <a:pPr algn="ctr"/>
-          </a:p>
-        </p:txBody>
-      </p:sp>
-      <p:sp>
-        <p:nvSpPr>
-          <p:cNvPr id="6" name="텍스트"/>
-          <p:cNvSpPr txBox="1"/>
-          <p:nvPr/>
-        </p:nvSpPr>
-        <p:spPr>
-          <a:xfrm>
-            <a:off x="360000" y="684000"/>
-            <a:ext cx="2520000" cy="313692"/>
-          </a:xfrm>
-          <a:prstGeom prst="rect">
-            <a:avLst/>
-          </a:prstGeom>
-          <a:noFill/>
-        </p:spPr>
-        <p:txBody>
-          <a:bodyPr wrap="square" lIns="0" rIns="0" tIns="0" bIns="0" anchor="t">
-            <a:spAutoFit/>
-          </a:bodyPr>
-          <a:lstStyle/>
-          <a:p>
-            <a:pPr algn="ctr">
-              <a:lnSpc>
-                <a:spcPts val="2755"/>
-              </a:lnSpc>
-            </a:pPr>
-            <a:r>
-              <a:rPr sz="1900" b="1" spc="50">
+              <a:rPr sz="2200" b="1">
                 <a:solidFill>
                   <a:srgbClr val="FFFFFF"/>
                 </a:solidFill>
@@ -3284,14 +3168,14 @@
       </p:sp>
       <p:sp>
         <p:nvSpPr>
-          <p:cNvPr id="7" name="텍스트"/>
+          <p:cNvPr id="4" name="텍스트"/>
           <p:cNvSpPr txBox="1"/>
           <p:nvPr/>
         </p:nvSpPr>
         <p:spPr>
           <a:xfrm>
-            <a:off x="360000" y="1051200"/>
-            <a:ext cx="2520000" cy="122400"/>
+            <a:off x="252000" y="676800"/>
+            <a:ext cx="2160000" cy="171451"/>
           </a:xfrm>
           <a:prstGeom prst="rect">
             <a:avLst/>
@@ -3304,15 +3188,15 @@
           </a:bodyPr>
           <a:lstStyle/>
           <a:p>
-            <a:pPr algn="ctr">
+            <a:pPr algn="l">
               <a:lnSpc>
-                <a:spcPts val="1232"/>
+                <a:spcPts val="1305"/>
               </a:lnSpc>
             </a:pPr>
             <a:r>
-              <a:rPr sz="850" b="1">
+              <a:rPr sz="900" b="0">
                 <a:solidFill>
-                  <a:srgbClr val="E5CC98"/>
+                  <a:srgbClr val="A3A9B5"/>
                 </a:solidFill>
                 <a:latin typeface="맑은 고딕"/>
                 <a:ea typeface="맑은 고딕"/>
@@ -3324,43 +3208,14 @@
       </p:sp>
       <p:sp>
         <p:nvSpPr>
-          <p:cNvPr id="8" name="Rectangle 7"/>
-          <p:cNvSpPr/>
-          <p:nvPr/>
-        </p:nvSpPr>
-        <p:spPr>
-          <a:xfrm>
-            <a:off x="1512000" y="1245600"/>
-            <a:ext cx="216000" cy="10800"/>
-          </a:xfrm>
-          <a:prstGeom prst="rect">
-            <a:avLst/>
-          </a:prstGeom>
-          <a:solidFill>
-            <a:srgbClr val="D7B061"/>
-          </a:solidFill>
-          <a:ln>
-            <a:noFill/>
-          </a:ln>
-        </p:spPr>
-        <p:txBody>
-          <a:bodyPr rtlCol="0" anchor="ctr"/>
-          <a:lstStyle/>
-          <a:p>
-            <a:pPr algn="ctr"/>
-          </a:p>
-        </p:txBody>
-      </p:sp>
-      <p:sp>
-        <p:nvSpPr>
-          <p:cNvPr id="9" name="텍스트"/>
+          <p:cNvPr id="5" name="텍스트"/>
           <p:cNvSpPr txBox="1"/>
           <p:nvPr/>
         </p:nvSpPr>
         <p:spPr>
           <a:xfrm>
-            <a:off x="360000" y="1339200"/>
-            <a:ext cx="2520000" cy="108000"/>
+            <a:off x="1548000" y="230400"/>
+            <a:ext cx="1440000" cy="123826"/>
           </a:xfrm>
           <a:prstGeom prst="rect">
             <a:avLst/>
@@ -3373,24 +3228,146 @@
           </a:bodyPr>
           <a:lstStyle/>
           <a:p>
-            <a:pPr algn="ctr">
+            <a:pPr algn="r">
               <a:lnSpc>
-                <a:spcPts val="1015"/>
+                <a:spcPts val="942"/>
               </a:lnSpc>
             </a:pPr>
             <a:r>
-              <a:rPr sz="700" b="0">
+              <a:rPr sz="650" b="1" spc="200">
+                <a:solidFill>
+                  <a:srgbClr val="A3A9B5"/>
+                </a:solidFill>
+                <a:latin typeface="맑은 고딕"/>
+                <a:ea typeface="맑은 고딕"/>
+              </a:rPr>
+              <a:t>회사 · 사무소 이름</a:t>
+            </a:r>
+          </a:p>
+        </p:txBody>
+      </p:sp>
+      <p:cxnSp>
+        <p:nvCxnSpPr>
+          <p:cNvPr id="6" name="Connector 5"/>
+          <p:cNvCxnSpPr/>
+          <p:nvPr/>
+        </p:nvCxnSpPr>
+        <p:spPr>
+          <a:xfrm>
+            <a:off x="252000" y="1051200"/>
+            <a:ext cx="2736000" cy="0"/>
+          </a:xfrm>
+          <a:prstGeom prst="line">
+            <a:avLst/>
+          </a:prstGeom>
+          <a:ln w="5760">
+            <a:solidFill>
+              <a:srgbClr val="2A2F38"/>
+            </a:solidFill>
+          </a:ln>
+        </p:spPr>
+      </p:cxnSp>
+      <p:sp>
+        <p:nvSpPr>
+          <p:cNvPr id="7" name="텍스트"/>
+          <p:cNvSpPr txBox="1"/>
+          <p:nvPr/>
+        </p:nvSpPr>
+        <p:spPr>
+          <a:xfrm>
+            <a:off x="252000" y="1123200"/>
+            <a:ext cx="576000" cy="99061"/>
+          </a:xfrm>
+          <a:prstGeom prst="rect">
+            <a:avLst/>
+          </a:prstGeom>
+          <a:noFill/>
+        </p:spPr>
+        <p:txBody>
+          <a:bodyPr wrap="square" lIns="0" rIns="0" tIns="0" bIns="0" anchor="t">
+            <a:spAutoFit/>
+          </a:bodyPr>
+          <a:lstStyle/>
+          <a:p>
+            <a:pPr algn="l">
+              <a:lnSpc>
+                <a:spcPts val="754"/>
+              </a:lnSpc>
+            </a:pPr>
+            <a:r>
+              <a:rPr sz="520" b="1" spc="150">
+                <a:solidFill>
+                  <a:srgbClr val="A3A9B5"/>
+                </a:solidFill>
+                <a:latin typeface="맑은 고딕"/>
+                <a:ea typeface="맑은 고딕"/>
+              </a:rPr>
+              <a:t>TEL</a:t>
+            </a:r>
+          </a:p>
+        </p:txBody>
+      </p:sp>
+      <p:sp>
+        <p:nvSpPr>
+          <p:cNvPr id="8" name="텍스트"/>
+          <p:cNvSpPr txBox="1"/>
+          <p:nvPr/>
+        </p:nvSpPr>
+        <p:spPr>
+          <a:xfrm>
+            <a:off x="900000" y="1101600"/>
+            <a:ext cx="2088000" cy="142876"/>
+          </a:xfrm>
+          <a:prstGeom prst="rect">
+            <a:avLst/>
+          </a:prstGeom>
+          <a:noFill/>
+        </p:spPr>
+        <p:txBody>
+          <a:bodyPr wrap="square" lIns="0" rIns="0" tIns="0" bIns="0" anchor="t">
+            <a:spAutoFit/>
+          </a:bodyPr>
+          <a:lstStyle/>
+          <a:p>
+            <a:pPr algn="l">
+              <a:lnSpc>
+                <a:spcPts val="1087"/>
+              </a:lnSpc>
+            </a:pPr>
+            <a:r>
+              <a:rPr sz="750" b="0">
                 <a:solidFill>
                   <a:srgbClr val="FFFFFF"/>
                 </a:solidFill>
                 <a:latin typeface="맑은 고딕"/>
                 <a:ea typeface="맑은 고딕"/>
               </a:rPr>
-              <a:t>010-1234-5678   ·   name@example.com</a:t>
-            </a:r>
-          </a:p>
-        </p:txBody>
-      </p:sp>
+              <a:t>010-1234-5678</a:t>
+            </a:r>
+          </a:p>
+        </p:txBody>
+      </p:sp>
+      <p:cxnSp>
+        <p:nvCxnSpPr>
+          <p:cNvPr id="9" name="Connector 8"/>
+          <p:cNvCxnSpPr/>
+          <p:nvPr/>
+        </p:nvCxnSpPr>
+        <p:spPr>
+          <a:xfrm>
+            <a:off x="252000" y="1274400"/>
+            <a:ext cx="2736000" cy="0"/>
+          </a:xfrm>
+          <a:prstGeom prst="line">
+            <a:avLst/>
+          </a:prstGeom>
+          <a:ln w="5760">
+            <a:solidFill>
+              <a:srgbClr val="2A2F38"/>
+            </a:solidFill>
+          </a:ln>
+        </p:spPr>
+      </p:cxnSp>
       <p:sp>
         <p:nvSpPr>
           <p:cNvPr id="10" name="텍스트"/>
@@ -3399,8 +3376,8 @@
         </p:nvSpPr>
         <p:spPr>
           <a:xfrm>
-            <a:off x="360000" y="1468800"/>
-            <a:ext cx="2520000" cy="108000"/>
+            <a:off x="252000" y="1346400"/>
+            <a:ext cx="576000" cy="99061"/>
           </a:xfrm>
           <a:prstGeom prst="rect">
             <a:avLst/>
@@ -3413,15 +3390,156 @@
           </a:bodyPr>
           <a:lstStyle/>
           <a:p>
-            <a:pPr algn="ctr">
+            <a:pPr algn="l">
               <a:lnSpc>
-                <a:spcPts val="1015"/>
+                <a:spcPts val="754"/>
               </a:lnSpc>
             </a:pPr>
             <a:r>
-              <a:rPr sz="700" b="0">
+              <a:rPr sz="520" b="1" spc="150">
                 <a:solidFill>
-                  <a:srgbClr val="D7CEBD"/>
+                  <a:srgbClr val="A3A9B5"/>
+                </a:solidFill>
+                <a:latin typeface="맑은 고딕"/>
+                <a:ea typeface="맑은 고딕"/>
+              </a:rPr>
+              <a:t>MAIL</a:t>
+            </a:r>
+          </a:p>
+        </p:txBody>
+      </p:sp>
+      <p:sp>
+        <p:nvSpPr>
+          <p:cNvPr id="11" name="텍스트"/>
+          <p:cNvSpPr txBox="1"/>
+          <p:nvPr/>
+        </p:nvSpPr>
+        <p:spPr>
+          <a:xfrm>
+            <a:off x="900000" y="1324800"/>
+            <a:ext cx="2088000" cy="142876"/>
+          </a:xfrm>
+          <a:prstGeom prst="rect">
+            <a:avLst/>
+          </a:prstGeom>
+          <a:noFill/>
+        </p:spPr>
+        <p:txBody>
+          <a:bodyPr wrap="square" lIns="0" rIns="0" tIns="0" bIns="0" anchor="t">
+            <a:spAutoFit/>
+          </a:bodyPr>
+          <a:lstStyle/>
+          <a:p>
+            <a:pPr algn="l">
+              <a:lnSpc>
+                <a:spcPts val="1087"/>
+              </a:lnSpc>
+            </a:pPr>
+            <a:r>
+              <a:rPr sz="750" b="0">
+                <a:solidFill>
+                  <a:srgbClr val="FFFFFF"/>
+                </a:solidFill>
+                <a:latin typeface="맑은 고딕"/>
+                <a:ea typeface="맑은 고딕"/>
+              </a:rPr>
+              <a:t>name@example.com</a:t>
+            </a:r>
+          </a:p>
+        </p:txBody>
+      </p:sp>
+      <p:cxnSp>
+        <p:nvCxnSpPr>
+          <p:cNvPr id="12" name="Connector 11"/>
+          <p:cNvCxnSpPr/>
+          <p:nvPr/>
+        </p:nvCxnSpPr>
+        <p:spPr>
+          <a:xfrm>
+            <a:off x="252000" y="1497600"/>
+            <a:ext cx="2736000" cy="0"/>
+          </a:xfrm>
+          <a:prstGeom prst="line">
+            <a:avLst/>
+          </a:prstGeom>
+          <a:ln w="5760">
+            <a:solidFill>
+              <a:srgbClr val="2A2F38"/>
+            </a:solidFill>
+          </a:ln>
+        </p:spPr>
+      </p:cxnSp>
+      <p:sp>
+        <p:nvSpPr>
+          <p:cNvPr id="13" name="텍스트"/>
+          <p:cNvSpPr txBox="1"/>
+          <p:nvPr/>
+        </p:nvSpPr>
+        <p:spPr>
+          <a:xfrm>
+            <a:off x="252000" y="1569600"/>
+            <a:ext cx="576000" cy="99061"/>
+          </a:xfrm>
+          <a:prstGeom prst="rect">
+            <a:avLst/>
+          </a:prstGeom>
+          <a:noFill/>
+        </p:spPr>
+        <p:txBody>
+          <a:bodyPr wrap="square" lIns="0" rIns="0" tIns="0" bIns="0" anchor="t">
+            <a:spAutoFit/>
+          </a:bodyPr>
+          <a:lstStyle/>
+          <a:p>
+            <a:pPr algn="l">
+              <a:lnSpc>
+                <a:spcPts val="754"/>
+              </a:lnSpc>
+            </a:pPr>
+            <a:r>
+              <a:rPr sz="520" b="1" spc="150">
+                <a:solidFill>
+                  <a:srgbClr val="A3A9B5"/>
+                </a:solidFill>
+                <a:latin typeface="맑은 고딕"/>
+                <a:ea typeface="맑은 고딕"/>
+              </a:rPr>
+              <a:t>ADDR</a:t>
+            </a:r>
+          </a:p>
+        </p:txBody>
+      </p:sp>
+      <p:sp>
+        <p:nvSpPr>
+          <p:cNvPr id="14" name="텍스트"/>
+          <p:cNvSpPr txBox="1"/>
+          <p:nvPr/>
+        </p:nvSpPr>
+        <p:spPr>
+          <a:xfrm>
+            <a:off x="900000" y="1548000"/>
+            <a:ext cx="2088000" cy="142876"/>
+          </a:xfrm>
+          <a:prstGeom prst="rect">
+            <a:avLst/>
+          </a:prstGeom>
+          <a:noFill/>
+        </p:spPr>
+        <p:txBody>
+          <a:bodyPr wrap="square" lIns="0" rIns="0" tIns="0" bIns="0" anchor="t">
+            <a:spAutoFit/>
+          </a:bodyPr>
+          <a:lstStyle/>
+          <a:p>
+            <a:pPr algn="l">
+              <a:lnSpc>
+                <a:spcPts val="1087"/>
+              </a:lnSpc>
+            </a:pPr>
+            <a:r>
+              <a:rPr sz="750" b="0">
+                <a:solidFill>
+                  <a:srgbClr val="FFFFFF"/>
                 </a:solidFill>
                 <a:latin typeface="맑은 고딕"/>
                 <a:ea typeface="맑은 고딕"/>
@@ -3431,6 +3549,27 @@
           </a:p>
         </p:txBody>
       </p:sp>
+      <p:cxnSp>
+        <p:nvCxnSpPr>
+          <p:cNvPr id="15" name="Connector 14"/>
+          <p:cNvCxnSpPr/>
+          <p:nvPr/>
+        </p:nvCxnSpPr>
+        <p:spPr>
+          <a:xfrm>
+            <a:off x="252000" y="1720800"/>
+            <a:ext cx="2736000" cy="0"/>
+          </a:xfrm>
+          <a:prstGeom prst="line">
+            <a:avLst/>
+          </a:prstGeom>
+          <a:ln w="5760">
+            <a:solidFill>
+              <a:srgbClr val="2A2F38"/>
+            </a:solidFill>
+          </a:ln>
+        </p:spPr>
+      </p:cxnSp>
     </p:spTree>
   </p:cSld>
   <p:clrMapOvr>
@@ -3445,7 +3584,7 @@
     <p:bg>
       <p:bgPr>
         <a:solidFill>
-          <a:srgbClr val="A0751C"/>
+          <a:srgbClr val="7A2CF5"/>
         </a:solidFill>
         <a:effectLst/>
       </p:bgPr>
@@ -3459,20 +3598,60 @@
       <p:grpSpPr/>
       <p:sp>
         <p:nvSpPr>
-          <p:cNvPr id="2" name="Rectangle 1"/>
+          <p:cNvPr id="2" name="텍스트"/>
+          <p:cNvSpPr txBox="1"/>
+          <p:nvPr/>
+        </p:nvSpPr>
+        <p:spPr>
+          <a:xfrm>
+            <a:off x="252000" y="324000"/>
+            <a:ext cx="2520000" cy="792000"/>
+          </a:xfrm>
+          <a:prstGeom prst="rect">
+            <a:avLst/>
+          </a:prstGeom>
+          <a:noFill/>
+        </p:spPr>
+        <p:txBody>
+          <a:bodyPr wrap="square" lIns="0" rIns="0" tIns="0" bIns="0" anchor="t">
+            <a:spAutoFit/>
+          </a:bodyPr>
+          <a:lstStyle/>
+          <a:p>
+            <a:pPr algn="l">
+              <a:lnSpc>
+                <a:spcPts val="1884"/>
+              </a:lnSpc>
+            </a:pPr>
+            <a:r>
+              <a:rPr sz="1300" b="1">
+                <a:solidFill>
+                  <a:srgbClr val="FFFFFF"/>
+                </a:solidFill>
+                <a:latin typeface="맑은 고딕"/>
+                <a:ea typeface="맑은 고딕"/>
+              </a:rPr>
+              <a:t>든든한 이웃 같은 상담사</a:t>
+            </a:r>
+          </a:p>
+        </p:txBody>
+      </p:sp>
+      <p:sp>
+        <p:nvSpPr>
+          <p:cNvPr id="3" name="Rectangle 2"/>
           <p:cNvSpPr/>
           <p:nvPr/>
         </p:nvSpPr>
         <p:spPr>
           <a:xfrm>
-            <a:off x="0" y="0"/>
-            <a:ext cx="1224000" cy="1800000"/>
+            <a:off x="0" y="1476000"/>
+            <a:ext cx="3240000" cy="324000"/>
           </a:xfrm>
           <a:prstGeom prst="rect">
             <a:avLst/>
           </a:prstGeom>
           <a:solidFill>
-            <a:srgbClr val="F7E8C9"/>
+            <a:srgbClr val="9556F7"/>
           </a:solidFill>
           <a:ln>
             <a:noFill/>
@@ -3488,63 +3667,56 @@
       </p:sp>
       <p:sp>
         <p:nvSpPr>
-          <p:cNvPr id="3" name="Freeform 2"/>
+          <p:cNvPr id="4" name="텍스트"/>
+          <p:cNvSpPr txBox="1"/>
+          <p:nvPr/>
+        </p:nvSpPr>
+        <p:spPr>
+          <a:xfrm>
+            <a:off x="252000" y="1569600"/>
+            <a:ext cx="1872000" cy="142876"/>
+          </a:xfrm>
+          <a:prstGeom prst="rect">
+            <a:avLst/>
+          </a:prstGeom>
+          <a:noFill/>
+        </p:spPr>
+        <p:txBody>
+          <a:bodyPr wrap="square" lIns="0" rIns="0" tIns="0" bIns="0" anchor="t">
+            <a:spAutoFit/>
+          </a:bodyPr>
+          <a:lstStyle/>
+          <a:p>
+            <a:pPr algn="l">
+              <a:lnSpc>
+                <a:spcPts val="1087"/>
+              </a:lnSpc>
+            </a:pPr>
+            <a:r>
+              <a:rPr sz="750" b="1" spc="200">
+                <a:solidFill>
+                  <a:srgbClr val="FFFFFF"/>
+                </a:solidFill>
+                <a:latin typeface="맑은 고딕"/>
+                <a:ea typeface="맑은 고딕"/>
+              </a:rPr>
+              <a:t>회사 · 사무소 이름</a:t>
+            </a:r>
+          </a:p>
+        </p:txBody>
+      </p:sp>
+      <p:sp>
+        <p:nvSpPr>
+          <p:cNvPr id="5" name="Oval 4"/>
           <p:cNvSpPr/>
           <p:nvPr/>
         </p:nvSpPr>
         <p:spPr>
           <a:xfrm>
-            <a:off x="363600" y="673200"/>
-            <a:ext cx="496800" cy="226800"/>
-          </a:xfrm>
-          <a:custGeom>
-            <a:avLst/>
-            <a:gdLst/>
-            <a:ahLst/>
-            <a:cxnLst/>
-            <a:rect l="l" t="t" r="r" b="b"/>
-            <a:pathLst>
-              <a:path w="496800" h="226800">
-                <a:moveTo>
-                  <a:pt x="0" y="226800"/>
-                </a:moveTo>
-                <a:lnTo>
-                  <a:pt x="248400" y="0"/>
-                </a:lnTo>
-                <a:lnTo>
-                  <a:pt x="496800" y="226800"/>
-                </a:lnTo>
-                <a:close/>
-              </a:path>
-            </a:pathLst>
-          </a:custGeom>
-          <a:solidFill>
-            <a:srgbClr val="666666"/>
-          </a:solidFill>
-          <a:ln>
-            <a:noFill/>
-          </a:ln>
-        </p:spPr>
-        <p:txBody>
-          <a:bodyPr rtlCol="0" anchor="ctr"/>
-          <a:lstStyle/>
-          <a:p>
-            <a:pPr algn="ctr"/>
-          </a:p>
-        </p:txBody>
-      </p:sp>
-      <p:sp>
-        <p:nvSpPr>
-          <p:cNvPr id="4" name="Rectangle 3"/>
-          <p:cNvSpPr/>
-          <p:nvPr/>
-        </p:nvSpPr>
-        <p:spPr>
-          <a:xfrm>
-            <a:off x="439200" y="900000"/>
-            <a:ext cx="345600" cy="226800"/>
-          </a:xfrm>
-          <a:prstGeom prst="rect">
+            <a:off x="2714400" y="1616400"/>
+            <a:ext cx="43200" cy="43200"/>
+          </a:xfrm>
+          <a:prstGeom prst="ellipse">
             <a:avLst/>
           </a:prstGeom>
           <a:solidFill>
@@ -3564,20 +3736,22 @@
       </p:sp>
       <p:sp>
         <p:nvSpPr>
-          <p:cNvPr id="5" name="Rectangle 4"/>
+          <p:cNvPr id="6" name="Oval 5"/>
           <p:cNvSpPr/>
           <p:nvPr/>
         </p:nvSpPr>
         <p:spPr>
           <a:xfrm>
-            <a:off x="568800" y="975600"/>
-            <a:ext cx="86400" cy="151200"/>
-          </a:xfrm>
-          <a:prstGeom prst="rect">
+            <a:off x="2822400" y="1616400"/>
+            <a:ext cx="43200" cy="43200"/>
+          </a:xfrm>
+          <a:prstGeom prst="ellipse">
             <a:avLst/>
           </a:prstGeom>
           <a:solidFill>
-            <a:srgbClr val="666666"/>
+            <a:srgbClr val="FFFFFF">
+              <a:alpha val="50000"/>
+            </a:srgbClr>
           </a:solidFill>
           <a:ln>
             <a:noFill/>
@@ -3593,77 +3767,22 @@
       </p:sp>
       <p:sp>
         <p:nvSpPr>
-          <p:cNvPr id="6" name="텍스트"/>
-          <p:cNvSpPr txBox="1"/>
-          <p:nvPr/>
-        </p:nvSpPr>
-        <p:spPr>
-          <a:xfrm>
-            <a:off x="1440000" y="432000"/>
-            <a:ext cx="1584000" cy="792000"/>
-          </a:xfrm>
-          <a:prstGeom prst="rect">
-            <a:avLst/>
-          </a:prstGeom>
-          <a:noFill/>
-        </p:spPr>
-        <p:txBody>
-          <a:bodyPr wrap="square" lIns="0" rIns="0" tIns="0" bIns="0" anchor="ctr">
-            <a:spAutoFit/>
-          </a:bodyPr>
-          <a:lstStyle/>
-          <a:p>
-            <a:pPr algn="l">
-              <a:lnSpc>
-                <a:spcPts val="1667"/>
-              </a:lnSpc>
-            </a:pPr>
-            <a:r>
-              <a:rPr sz="1150" b="1">
-                <a:solidFill>
-                  <a:srgbClr val="FFFFFF"/>
-                </a:solidFill>
-                <a:latin typeface="맑은 고딕"/>
-                <a:ea typeface="맑은 고딕"/>
-              </a:rPr>
-              <a:t>든든한 이웃</a:t>
-            </a:r>
-          </a:p>
-          <a:p>
-            <a:pPr algn="l">
-              <a:lnSpc>
-                <a:spcPts val="1667"/>
-              </a:lnSpc>
-            </a:pPr>
-            <a:r>
-              <a:rPr sz="1150" b="1">
-                <a:solidFill>
-                  <a:srgbClr val="FFFFFF"/>
-                </a:solidFill>
-                <a:latin typeface="맑은 고딕"/>
-                <a:ea typeface="맑은 고딕"/>
-              </a:rPr>
-              <a:t>같은 상담사</a:t>
-            </a:r>
-          </a:p>
-        </p:txBody>
-      </p:sp>
-      <p:sp>
-        <p:nvSpPr>
-          <p:cNvPr id="7" name="Rectangle 6"/>
+          <p:cNvPr id="7" name="Oval 6"/>
           <p:cNvSpPr/>
           <p:nvPr/>
         </p:nvSpPr>
         <p:spPr>
           <a:xfrm>
-            <a:off x="1440000" y="1317600"/>
-            <a:ext cx="180000" cy="10800"/>
-          </a:xfrm>
-          <a:prstGeom prst="rect">
+            <a:off x="2930400" y="1616400"/>
+            <a:ext cx="43200" cy="43200"/>
+          </a:xfrm>
+          <a:prstGeom prst="ellipse">
             <a:avLst/>
           </a:prstGeom>
           <a:solidFill>
-            <a:srgbClr val="F7E8C9"/>
+            <a:srgbClr val="FFFFFF">
+              <a:alpha val="50000"/>
+            </a:srgbClr>
           </a:solidFill>
           <a:ln>
             <a:noFill/>
@@ -3674,46 +3793,6 @@
           <a:lstStyle/>
           <a:p>
             <a:pPr algn="ctr"/>
-          </a:p>
-        </p:txBody>
-      </p:sp>
-      <p:sp>
-        <p:nvSpPr>
-          <p:cNvPr id="8" name="텍스트"/>
-          <p:cNvSpPr txBox="1"/>
-          <p:nvPr/>
-        </p:nvSpPr>
-        <p:spPr>
-          <a:xfrm>
-            <a:off x="1440000" y="1418400"/>
-            <a:ext cx="1584000" cy="108000"/>
-          </a:xfrm>
-          <a:prstGeom prst="rect">
-            <a:avLst/>
-          </a:prstGeom>
-          <a:noFill/>
-        </p:spPr>
-        <p:txBody>
-          <a:bodyPr wrap="square" lIns="0" rIns="0" tIns="0" bIns="0" anchor="t">
-            <a:spAutoFit/>
-          </a:bodyPr>
-          <a:lstStyle/>
-          <a:p>
-            <a:pPr algn="l">
-              <a:lnSpc>
-                <a:spcPts val="1087"/>
-              </a:lnSpc>
-            </a:pPr>
-            <a:r>
-              <a:rPr sz="750" b="1" spc="200">
-                <a:solidFill>
-                  <a:srgbClr val="FFFFFF"/>
-                </a:solidFill>
-                <a:latin typeface="맑은 고딕"/>
-                <a:ea typeface="맑은 고딕"/>
-              </a:rPr>
-              <a:t>회사 · 사무소 이름</a:t>
-            </a:r>
           </a:p>
         </p:txBody>
       </p:sp>

--- a/public/fun/cards/finance/finance-32.pptx
+++ b/public/fun/cards/finance/finance-32.pptx
@@ -3105,8 +3105,8 @@
         </p:nvSpPr>
         <p:spPr>
           <a:xfrm>
-            <a:off x="252000" y="144000"/>
-            <a:ext cx="201600" cy="21600"/>
+            <a:off x="0" y="0"/>
+            <a:ext cx="3240000" cy="36000"/>
           </a:xfrm>
           <a:prstGeom prst="rect">
             <a:avLst/>
@@ -3134,8 +3134,8 @@
         </p:nvSpPr>
         <p:spPr>
           <a:xfrm>
-            <a:off x="252000" y="273600"/>
-            <a:ext cx="2160000" cy="360000"/>
+            <a:off x="252000" y="223200"/>
+            <a:ext cx="1296000" cy="237600"/>
           </a:xfrm>
           <a:prstGeom prst="rect">
             <a:avLst/>
@@ -3150,11 +3150,11 @@
           <a:p>
             <a:pPr algn="l">
               <a:lnSpc>
-                <a:spcPts val="3190"/>
+                <a:spcPts val="1957"/>
               </a:lnSpc>
             </a:pPr>
             <a:r>
-              <a:rPr sz="2200" b="1">
+              <a:rPr sz="1350" b="1" spc="120">
                 <a:solidFill>
                   <a:srgbClr val="FFFFFF"/>
                 </a:solidFill>
@@ -3174,8 +3174,8 @@
         </p:nvSpPr>
         <p:spPr>
           <a:xfrm>
-            <a:off x="252000" y="676800"/>
-            <a:ext cx="2160000" cy="171451"/>
+            <a:off x="252000" y="475200"/>
+            <a:ext cx="1296000" cy="133351"/>
           </a:xfrm>
           <a:prstGeom prst="rect">
             <a:avLst/>
@@ -3190,11 +3190,11 @@
           <a:p>
             <a:pPr algn="l">
               <a:lnSpc>
-                <a:spcPts val="1305"/>
+                <a:spcPts val="1015"/>
               </a:lnSpc>
             </a:pPr>
             <a:r>
-              <a:rPr sz="900" b="0">
+              <a:rPr sz="700" b="0">
                 <a:solidFill>
                   <a:srgbClr val="A3A9B5"/>
                 </a:solidFill>
@@ -3214,7 +3214,7 @@
         </p:nvSpPr>
         <p:spPr>
           <a:xfrm>
-            <a:off x="1548000" y="230400"/>
+            <a:off x="1548000" y="259200"/>
             <a:ext cx="1440000" cy="123826"/>
           </a:xfrm>
           <a:prstGeom prst="rect">
@@ -3234,7 +3234,7 @@
               </a:lnSpc>
             </a:pPr>
             <a:r>
-              <a:rPr sz="650" b="1" spc="200">
+              <a:rPr sz="650" b="1" spc="220">
                 <a:solidFill>
                   <a:srgbClr val="A3A9B5"/>
                 </a:solidFill>
@@ -3254,13 +3254,13 @@
         </p:nvCxnSpPr>
         <p:spPr>
           <a:xfrm>
-            <a:off x="252000" y="1051200"/>
+            <a:off x="252000" y="907200"/>
             <a:ext cx="2736000" cy="0"/>
           </a:xfrm>
           <a:prstGeom prst="line">
             <a:avLst/>
           </a:prstGeom>
-          <a:ln w="5760">
+          <a:ln w="3600">
             <a:solidFill>
               <a:srgbClr val="2A2F38"/>
             </a:solidFill>
@@ -3275,8 +3275,8 @@
         </p:nvSpPr>
         <p:spPr>
           <a:xfrm>
-            <a:off x="252000" y="1123200"/>
-            <a:ext cx="576000" cy="99061"/>
+            <a:off x="252000" y="986400"/>
+            <a:ext cx="576000" cy="91441"/>
           </a:xfrm>
           <a:prstGeom prst="rect">
             <a:avLst/>
@@ -3291,11 +3291,11 @@
           <a:p>
             <a:pPr algn="l">
               <a:lnSpc>
-                <a:spcPts val="754"/>
+                <a:spcPts val="696"/>
               </a:lnSpc>
             </a:pPr>
             <a:r>
-              <a:rPr sz="520" b="1" spc="150">
+              <a:rPr sz="480" b="1" spc="160">
                 <a:solidFill>
                   <a:srgbClr val="A3A9B5"/>
                 </a:solidFill>
@@ -3315,8 +3315,8 @@
         </p:nvSpPr>
         <p:spPr>
           <a:xfrm>
-            <a:off x="900000" y="1101600"/>
-            <a:ext cx="2088000" cy="142876"/>
+            <a:off x="936000" y="968400"/>
+            <a:ext cx="2052000" cy="133351"/>
           </a:xfrm>
           <a:prstGeom prst="rect">
             <a:avLst/>
@@ -3331,11 +3331,11 @@
           <a:p>
             <a:pPr algn="l">
               <a:lnSpc>
-                <a:spcPts val="1087"/>
+                <a:spcPts val="1015"/>
               </a:lnSpc>
             </a:pPr>
             <a:r>
-              <a:rPr sz="750" b="0">
+              <a:rPr sz="700" b="0">
                 <a:solidFill>
                   <a:srgbClr val="FFFFFF"/>
                 </a:solidFill>
@@ -3355,13 +3355,13 @@
         </p:nvCxnSpPr>
         <p:spPr>
           <a:xfrm>
-            <a:off x="252000" y="1274400"/>
+            <a:off x="252000" y="1137600"/>
             <a:ext cx="2736000" cy="0"/>
           </a:xfrm>
           <a:prstGeom prst="line">
             <a:avLst/>
           </a:prstGeom>
-          <a:ln w="5760">
+          <a:ln w="3600">
             <a:solidFill>
               <a:srgbClr val="2A2F38"/>
             </a:solidFill>
@@ -3376,8 +3376,8 @@
         </p:nvSpPr>
         <p:spPr>
           <a:xfrm>
-            <a:off x="252000" y="1346400"/>
-            <a:ext cx="576000" cy="99061"/>
+            <a:off x="252000" y="1216800"/>
+            <a:ext cx="576000" cy="91441"/>
           </a:xfrm>
           <a:prstGeom prst="rect">
             <a:avLst/>
@@ -3392,11 +3392,11 @@
           <a:p>
             <a:pPr algn="l">
               <a:lnSpc>
-                <a:spcPts val="754"/>
+                <a:spcPts val="696"/>
               </a:lnSpc>
             </a:pPr>
             <a:r>
-              <a:rPr sz="520" b="1" spc="150">
+              <a:rPr sz="480" b="1" spc="160">
                 <a:solidFill>
                   <a:srgbClr val="A3A9B5"/>
                 </a:solidFill>
@@ -3416,8 +3416,8 @@
         </p:nvSpPr>
         <p:spPr>
           <a:xfrm>
-            <a:off x="900000" y="1324800"/>
-            <a:ext cx="2088000" cy="142876"/>
+            <a:off x="936000" y="1198800"/>
+            <a:ext cx="2052000" cy="133351"/>
           </a:xfrm>
           <a:prstGeom prst="rect">
             <a:avLst/>
@@ -3432,11 +3432,11 @@
           <a:p>
             <a:pPr algn="l">
               <a:lnSpc>
-                <a:spcPts val="1087"/>
+                <a:spcPts val="1015"/>
               </a:lnSpc>
             </a:pPr>
             <a:r>
-              <a:rPr sz="750" b="0">
+              <a:rPr sz="700" b="0">
                 <a:solidFill>
                   <a:srgbClr val="FFFFFF"/>
                 </a:solidFill>
@@ -3456,13 +3456,13 @@
         </p:nvCxnSpPr>
         <p:spPr>
           <a:xfrm>
-            <a:off x="252000" y="1497600"/>
+            <a:off x="252000" y="1368000"/>
             <a:ext cx="2736000" cy="0"/>
           </a:xfrm>
           <a:prstGeom prst="line">
             <a:avLst/>
           </a:prstGeom>
-          <a:ln w="5760">
+          <a:ln w="3600">
             <a:solidFill>
               <a:srgbClr val="2A2F38"/>
             </a:solidFill>
@@ -3477,8 +3477,8 @@
         </p:nvSpPr>
         <p:spPr>
           <a:xfrm>
-            <a:off x="252000" y="1569600"/>
-            <a:ext cx="576000" cy="99061"/>
+            <a:off x="252000" y="1447200"/>
+            <a:ext cx="576000" cy="91441"/>
           </a:xfrm>
           <a:prstGeom prst="rect">
             <a:avLst/>
@@ -3493,11 +3493,11 @@
           <a:p>
             <a:pPr algn="l">
               <a:lnSpc>
-                <a:spcPts val="754"/>
+                <a:spcPts val="696"/>
               </a:lnSpc>
             </a:pPr>
             <a:r>
-              <a:rPr sz="520" b="1" spc="150">
+              <a:rPr sz="480" b="1" spc="160">
                 <a:solidFill>
                   <a:srgbClr val="A3A9B5"/>
                 </a:solidFill>
@@ -3517,8 +3517,8 @@
         </p:nvSpPr>
         <p:spPr>
           <a:xfrm>
-            <a:off x="900000" y="1548000"/>
-            <a:ext cx="2088000" cy="142876"/>
+            <a:off x="936000" y="1429200"/>
+            <a:ext cx="2052000" cy="133351"/>
           </a:xfrm>
           <a:prstGeom prst="rect">
             <a:avLst/>
@@ -3533,11 +3533,11 @@
           <a:p>
             <a:pPr algn="l">
               <a:lnSpc>
-                <a:spcPts val="1087"/>
+                <a:spcPts val="1015"/>
               </a:lnSpc>
             </a:pPr>
             <a:r>
-              <a:rPr sz="750" b="0">
+              <a:rPr sz="700" b="0">
                 <a:solidFill>
                   <a:srgbClr val="FFFFFF"/>
                 </a:solidFill>
@@ -3557,13 +3557,13 @@
         </p:nvCxnSpPr>
         <p:spPr>
           <a:xfrm>
-            <a:off x="252000" y="1720800"/>
+            <a:off x="252000" y="1598400"/>
             <a:ext cx="2736000" cy="0"/>
           </a:xfrm>
           <a:prstGeom prst="line">
             <a:avLst/>
           </a:prstGeom>
-          <a:ln w="5760">
+          <a:ln w="3600">
             <a:solidFill>
               <a:srgbClr val="2A2F38"/>
             </a:solidFill>
@@ -3604,8 +3604,8 @@
         </p:nvSpPr>
         <p:spPr>
           <a:xfrm>
-            <a:off x="252000" y="324000"/>
-            <a:ext cx="2520000" cy="792000"/>
+            <a:off x="252000" y="252000"/>
+            <a:ext cx="1080000" cy="99061"/>
           </a:xfrm>
           <a:prstGeom prst="rect">
             <a:avLst/>
@@ -3620,18 +3620,18 @@
           <a:p>
             <a:pPr algn="l">
               <a:lnSpc>
-                <a:spcPts val="1884"/>
+                <a:spcPts val="754"/>
               </a:lnSpc>
             </a:pPr>
             <a:r>
-              <a:rPr sz="1300" b="1">
+              <a:rPr sz="520" b="1" spc="240">
                 <a:solidFill>
-                  <a:srgbClr val="FFFFFF"/>
+                  <a:srgbClr val="E2D1FD"/>
                 </a:solidFill>
                 <a:latin typeface="맑은 고딕"/>
                 <a:ea typeface="맑은 고딕"/>
               </a:rPr>
-              <a:t>든든한 이웃 같은 상담사</a:t>
+              <a:t>상담 분야</a:t>
             </a:r>
           </a:p>
         </p:txBody>
@@ -3644,79 +3644,10 @@
         </p:nvSpPr>
         <p:spPr>
           <a:xfrm>
-            <a:off x="0" y="1476000"/>
-            <a:ext cx="3240000" cy="324000"/>
+            <a:off x="252000" y="352800"/>
+            <a:ext cx="108000" cy="14400"/>
           </a:xfrm>
           <a:prstGeom prst="rect">
-            <a:avLst/>
-          </a:prstGeom>
-          <a:solidFill>
-            <a:srgbClr val="9556F7"/>
-          </a:solidFill>
-          <a:ln>
-            <a:noFill/>
-          </a:ln>
-        </p:spPr>
-        <p:txBody>
-          <a:bodyPr rtlCol="0" anchor="ctr"/>
-          <a:lstStyle/>
-          <a:p>
-            <a:pPr algn="ctr"/>
-          </a:p>
-        </p:txBody>
-      </p:sp>
-      <p:sp>
-        <p:nvSpPr>
-          <p:cNvPr id="4" name="텍스트"/>
-          <p:cNvSpPr txBox="1"/>
-          <p:nvPr/>
-        </p:nvSpPr>
-        <p:spPr>
-          <a:xfrm>
-            <a:off x="252000" y="1569600"/>
-            <a:ext cx="1872000" cy="142876"/>
-          </a:xfrm>
-          <a:prstGeom prst="rect">
-            <a:avLst/>
-          </a:prstGeom>
-          <a:noFill/>
-        </p:spPr>
-        <p:txBody>
-          <a:bodyPr wrap="square" lIns="0" rIns="0" tIns="0" bIns="0" anchor="t">
-            <a:spAutoFit/>
-          </a:bodyPr>
-          <a:lstStyle/>
-          <a:p>
-            <a:pPr algn="l">
-              <a:lnSpc>
-                <a:spcPts val="1087"/>
-              </a:lnSpc>
-            </a:pPr>
-            <a:r>
-              <a:rPr sz="750" b="1" spc="200">
-                <a:solidFill>
-                  <a:srgbClr val="FFFFFF"/>
-                </a:solidFill>
-                <a:latin typeface="맑은 고딕"/>
-                <a:ea typeface="맑은 고딕"/>
-              </a:rPr>
-              <a:t>회사 · 사무소 이름</a:t>
-            </a:r>
-          </a:p>
-        </p:txBody>
-      </p:sp>
-      <p:sp>
-        <p:nvSpPr>
-          <p:cNvPr id="5" name="Oval 4"/>
-          <p:cNvSpPr/>
-          <p:nvPr/>
-        </p:nvSpPr>
-        <p:spPr>
-          <a:xfrm>
-            <a:off x="2714400" y="1616400"/>
-            <a:ext cx="43200" cy="43200"/>
-          </a:xfrm>
-          <a:prstGeom prst="ellipse">
             <a:avLst/>
           </a:prstGeom>
           <a:solidFill>
@@ -3734,27 +3665,291 @@
           </a:p>
         </p:txBody>
       </p:sp>
-      <p:sp>
-        <p:nvSpPr>
-          <p:cNvPr id="6" name="Oval 5"/>
+      <p:cxnSp>
+        <p:nvCxnSpPr>
+          <p:cNvPr id="4" name="Connector 3"/>
+          <p:cNvCxnSpPr/>
+          <p:nvPr/>
+        </p:nvCxnSpPr>
+        <p:spPr>
+          <a:xfrm>
+            <a:off x="252000" y="468000"/>
+            <a:ext cx="1512000" cy="0"/>
+          </a:xfrm>
+          <a:prstGeom prst="line">
+            <a:avLst/>
+          </a:prstGeom>
+          <a:ln w="3600">
+            <a:solidFill>
+              <a:srgbClr val="AF80F9"/>
+            </a:solidFill>
+          </a:ln>
+        </p:spPr>
+      </p:cxnSp>
+      <p:sp>
+        <p:nvSpPr>
+          <p:cNvPr id="5" name="텍스트"/>
+          <p:cNvSpPr txBox="1"/>
+          <p:nvPr/>
+        </p:nvSpPr>
+        <p:spPr>
+          <a:xfrm>
+            <a:off x="252000" y="511200"/>
+            <a:ext cx="1260000" cy="133351"/>
+          </a:xfrm>
+          <a:prstGeom prst="rect">
+            <a:avLst/>
+          </a:prstGeom>
+          <a:noFill/>
+        </p:spPr>
+        <p:txBody>
+          <a:bodyPr wrap="square" lIns="0" rIns="0" tIns="0" bIns="0" anchor="t">
+            <a:spAutoFit/>
+          </a:bodyPr>
+          <a:lstStyle/>
+          <a:p>
+            <a:pPr algn="l">
+              <a:lnSpc>
+                <a:spcPts val="1015"/>
+              </a:lnSpc>
+            </a:pPr>
+            <a:r>
+              <a:rPr sz="700" b="0">
+                <a:solidFill>
+                  <a:srgbClr val="FFFFFF"/>
+                </a:solidFill>
+                <a:latin typeface="맑은 고딕"/>
+                <a:ea typeface="맑은 고딕"/>
+              </a:rPr>
+              <a:t>연금 설계</a:t>
+            </a:r>
+          </a:p>
+        </p:txBody>
+      </p:sp>
+      <p:cxnSp>
+        <p:nvCxnSpPr>
+          <p:cNvPr id="6" name="Connector 5"/>
+          <p:cNvCxnSpPr/>
+          <p:nvPr/>
+        </p:nvCxnSpPr>
+        <p:spPr>
+          <a:xfrm>
+            <a:off x="252000" y="655200"/>
+            <a:ext cx="1512000" cy="0"/>
+          </a:xfrm>
+          <a:prstGeom prst="line">
+            <a:avLst/>
+          </a:prstGeom>
+          <a:ln w="3600">
+            <a:solidFill>
+              <a:srgbClr val="AF80F9"/>
+            </a:solidFill>
+          </a:ln>
+        </p:spPr>
+      </p:cxnSp>
+      <p:sp>
+        <p:nvSpPr>
+          <p:cNvPr id="7" name="텍스트"/>
+          <p:cNvSpPr txBox="1"/>
+          <p:nvPr/>
+        </p:nvSpPr>
+        <p:spPr>
+          <a:xfrm>
+            <a:off x="252000" y="698400"/>
+            <a:ext cx="1260000" cy="133351"/>
+          </a:xfrm>
+          <a:prstGeom prst="rect">
+            <a:avLst/>
+          </a:prstGeom>
+          <a:noFill/>
+        </p:spPr>
+        <p:txBody>
+          <a:bodyPr wrap="square" lIns="0" rIns="0" tIns="0" bIns="0" anchor="t">
+            <a:spAutoFit/>
+          </a:bodyPr>
+          <a:lstStyle/>
+          <a:p>
+            <a:pPr algn="l">
+              <a:lnSpc>
+                <a:spcPts val="1015"/>
+              </a:lnSpc>
+            </a:pPr>
+            <a:r>
+              <a:rPr sz="700" b="0">
+                <a:solidFill>
+                  <a:srgbClr val="FFFFFF"/>
+                </a:solidFill>
+                <a:latin typeface="맑은 고딕"/>
+                <a:ea typeface="맑은 고딕"/>
+              </a:rPr>
+              <a:t>자산 관리</a:t>
+            </a:r>
+          </a:p>
+        </p:txBody>
+      </p:sp>
+      <p:cxnSp>
+        <p:nvCxnSpPr>
+          <p:cNvPr id="8" name="Connector 7"/>
+          <p:cNvCxnSpPr/>
+          <p:nvPr/>
+        </p:nvCxnSpPr>
+        <p:spPr>
+          <a:xfrm>
+            <a:off x="252000" y="842400"/>
+            <a:ext cx="1512000" cy="0"/>
+          </a:xfrm>
+          <a:prstGeom prst="line">
+            <a:avLst/>
+          </a:prstGeom>
+          <a:ln w="3600">
+            <a:solidFill>
+              <a:srgbClr val="AF80F9"/>
+            </a:solidFill>
+          </a:ln>
+        </p:spPr>
+      </p:cxnSp>
+      <p:sp>
+        <p:nvSpPr>
+          <p:cNvPr id="9" name="텍스트"/>
+          <p:cNvSpPr txBox="1"/>
+          <p:nvPr/>
+        </p:nvSpPr>
+        <p:spPr>
+          <a:xfrm>
+            <a:off x="252000" y="885600"/>
+            <a:ext cx="1260000" cy="133351"/>
+          </a:xfrm>
+          <a:prstGeom prst="rect">
+            <a:avLst/>
+          </a:prstGeom>
+          <a:noFill/>
+        </p:spPr>
+        <p:txBody>
+          <a:bodyPr wrap="square" lIns="0" rIns="0" tIns="0" bIns="0" anchor="t">
+            <a:spAutoFit/>
+          </a:bodyPr>
+          <a:lstStyle/>
+          <a:p>
+            <a:pPr algn="l">
+              <a:lnSpc>
+                <a:spcPts val="1015"/>
+              </a:lnSpc>
+            </a:pPr>
+            <a:r>
+              <a:rPr sz="700" b="0">
+                <a:solidFill>
+                  <a:srgbClr val="FFFFFF"/>
+                </a:solidFill>
+                <a:latin typeface="맑은 고딕"/>
+                <a:ea typeface="맑은 고딕"/>
+              </a:rPr>
+              <a:t>법인 상담</a:t>
+            </a:r>
+          </a:p>
+        </p:txBody>
+      </p:sp>
+      <p:cxnSp>
+        <p:nvCxnSpPr>
+          <p:cNvPr id="10" name="Connector 9"/>
+          <p:cNvCxnSpPr/>
+          <p:nvPr/>
+        </p:nvCxnSpPr>
+        <p:spPr>
+          <a:xfrm>
+            <a:off x="252000" y="1029600"/>
+            <a:ext cx="1512000" cy="0"/>
+          </a:xfrm>
+          <a:prstGeom prst="line">
+            <a:avLst/>
+          </a:prstGeom>
+          <a:ln w="3600">
+            <a:solidFill>
+              <a:srgbClr val="AF80F9"/>
+            </a:solidFill>
+          </a:ln>
+        </p:spPr>
+      </p:cxnSp>
+      <p:sp>
+        <p:nvSpPr>
+          <p:cNvPr id="11" name="텍스트"/>
+          <p:cNvSpPr txBox="1"/>
+          <p:nvPr/>
+        </p:nvSpPr>
+        <p:spPr>
+          <a:xfrm>
+            <a:off x="252000" y="1072800"/>
+            <a:ext cx="1260000" cy="133351"/>
+          </a:xfrm>
+          <a:prstGeom prst="rect">
+            <a:avLst/>
+          </a:prstGeom>
+          <a:noFill/>
+        </p:spPr>
+        <p:txBody>
+          <a:bodyPr wrap="square" lIns="0" rIns="0" tIns="0" bIns="0" anchor="t">
+            <a:spAutoFit/>
+          </a:bodyPr>
+          <a:lstStyle/>
+          <a:p>
+            <a:pPr algn="l">
+              <a:lnSpc>
+                <a:spcPts val="1015"/>
+              </a:lnSpc>
+            </a:pPr>
+            <a:r>
+              <a:rPr sz="700" b="0">
+                <a:solidFill>
+                  <a:srgbClr val="FFFFFF"/>
+                </a:solidFill>
+                <a:latin typeface="맑은 고딕"/>
+                <a:ea typeface="맑은 고딕"/>
+              </a:rPr>
+              <a:t>증권 정리</a:t>
+            </a:r>
+          </a:p>
+        </p:txBody>
+      </p:sp>
+      <p:cxnSp>
+        <p:nvCxnSpPr>
+          <p:cNvPr id="12" name="Connector 11"/>
+          <p:cNvCxnSpPr/>
+          <p:nvPr/>
+        </p:nvCxnSpPr>
+        <p:spPr>
+          <a:xfrm>
+            <a:off x="252000" y="1216800"/>
+            <a:ext cx="1512000" cy="0"/>
+          </a:xfrm>
+          <a:prstGeom prst="line">
+            <a:avLst/>
+          </a:prstGeom>
+          <a:ln w="3600">
+            <a:solidFill>
+              <a:srgbClr val="AF80F9"/>
+            </a:solidFill>
+          </a:ln>
+        </p:spPr>
+      </p:cxnSp>
+      <p:sp>
+        <p:nvSpPr>
+          <p:cNvPr id="13" name="Rectangle 12"/>
           <p:cNvSpPr/>
           <p:nvPr/>
         </p:nvSpPr>
         <p:spPr>
           <a:xfrm>
-            <a:off x="2822400" y="1616400"/>
-            <a:ext cx="43200" cy="43200"/>
-          </a:xfrm>
-          <a:prstGeom prst="ellipse">
+            <a:off x="2196000" y="396000"/>
+            <a:ext cx="720000" cy="720000"/>
+          </a:xfrm>
+          <a:prstGeom prst="rect">
             <a:avLst/>
           </a:prstGeom>
-          <a:solidFill>
-            <a:srgbClr val="FFFFFF">
-              <a:alpha val="50000"/>
-            </a:srgbClr>
-          </a:solidFill>
-          <a:ln>
-            <a:noFill/>
+          <a:noFill/>
+          <a:ln w="4320">
+            <a:solidFill>
+              <a:srgbClr val="E2D1FD"/>
+            </a:solidFill>
+            <a:prstDash val="dash"/>
           </a:ln>
         </p:spPr>
         <p:txBody>
@@ -3767,32 +3962,121 @@
       </p:sp>
       <p:sp>
         <p:nvSpPr>
-          <p:cNvPr id="7" name="Oval 6"/>
-          <p:cNvSpPr/>
+          <p:cNvPr id="14" name="텍스트"/>
+          <p:cNvSpPr txBox="1"/>
           <p:nvPr/>
         </p:nvSpPr>
         <p:spPr>
           <a:xfrm>
-            <a:off x="2930400" y="1616400"/>
-            <a:ext cx="43200" cy="43200"/>
-          </a:xfrm>
-          <a:prstGeom prst="ellipse">
+            <a:off x="2196000" y="396000"/>
+            <a:ext cx="720000" cy="720000"/>
+          </a:xfrm>
+          <a:prstGeom prst="rect">
             <a:avLst/>
           </a:prstGeom>
-          <a:solidFill>
-            <a:srgbClr val="FFFFFF">
-              <a:alpha val="50000"/>
-            </a:srgbClr>
-          </a:solidFill>
-          <a:ln>
-            <a:noFill/>
-          </a:ln>
-        </p:spPr>
-        <p:txBody>
-          <a:bodyPr rtlCol="0" anchor="ctr"/>
-          <a:lstStyle/>
-          <a:p>
-            <a:pPr algn="ctr"/>
+          <a:noFill/>
+        </p:spPr>
+        <p:txBody>
+          <a:bodyPr wrap="square" lIns="0" rIns="0" tIns="0" bIns="0" anchor="ctr">
+            <a:spAutoFit/>
+          </a:bodyPr>
+          <a:lstStyle/>
+          <a:p>
+            <a:pPr algn="ctr">
+              <a:lnSpc>
+                <a:spcPts val="1305"/>
+              </a:lnSpc>
+            </a:pPr>
+            <a:r>
+              <a:rPr sz="900" b="1">
+                <a:solidFill>
+                  <a:srgbClr val="E2D1FD"/>
+                </a:solidFill>
+                <a:latin typeface="맑은 고딕"/>
+                <a:ea typeface="맑은 고딕"/>
+              </a:rPr>
+              <a:t>QR</a:t>
+            </a:r>
+          </a:p>
+        </p:txBody>
+      </p:sp>
+      <p:sp>
+        <p:nvSpPr>
+          <p:cNvPr id="15" name="텍스트"/>
+          <p:cNvSpPr txBox="1"/>
+          <p:nvPr/>
+        </p:nvSpPr>
+        <p:spPr>
+          <a:xfrm>
+            <a:off x="2196000" y="1209600"/>
+            <a:ext cx="720000" cy="118111"/>
+          </a:xfrm>
+          <a:prstGeom prst="rect">
+            <a:avLst/>
+          </a:prstGeom>
+          <a:noFill/>
+        </p:spPr>
+        <p:txBody>
+          <a:bodyPr wrap="square" lIns="0" rIns="0" tIns="0" bIns="0" anchor="t">
+            <a:spAutoFit/>
+          </a:bodyPr>
+          <a:lstStyle/>
+          <a:p>
+            <a:pPr algn="ctr">
+              <a:lnSpc>
+                <a:spcPts val="899"/>
+              </a:lnSpc>
+            </a:pPr>
+            <a:r>
+              <a:rPr sz="620" b="0">
+                <a:solidFill>
+                  <a:srgbClr val="FFFFFF"/>
+                </a:solidFill>
+                <a:latin typeface="맑은 고딕"/>
+                <a:ea typeface="맑은 고딕"/>
+              </a:rPr>
+              <a:t>@아이디</a:t>
+            </a:r>
+          </a:p>
+        </p:txBody>
+      </p:sp>
+      <p:sp>
+        <p:nvSpPr>
+          <p:cNvPr id="16" name="텍스트"/>
+          <p:cNvSpPr txBox="1"/>
+          <p:nvPr/>
+        </p:nvSpPr>
+        <p:spPr>
+          <a:xfrm>
+            <a:off x="2196000" y="1353600"/>
+            <a:ext cx="720000" cy="118111"/>
+          </a:xfrm>
+          <a:prstGeom prst="rect">
+            <a:avLst/>
+          </a:prstGeom>
+          <a:noFill/>
+        </p:spPr>
+        <p:txBody>
+          <a:bodyPr wrap="square" lIns="0" rIns="0" tIns="0" bIns="0" anchor="t">
+            <a:spAutoFit/>
+          </a:bodyPr>
+          <a:lstStyle/>
+          <a:p>
+            <a:pPr algn="ctr">
+              <a:lnSpc>
+                <a:spcPts val="899"/>
+              </a:lnSpc>
+            </a:pPr>
+            <a:r>
+              <a:rPr sz="620" b="0">
+                <a:solidFill>
+                  <a:srgbClr val="E2D1FD"/>
+                </a:solidFill>
+                <a:latin typeface="맑은 고딕"/>
+                <a:ea typeface="맑은 고딕"/>
+              </a:rPr>
+              <a:t>평일 09:00 – 18:00</a:t>
+            </a:r>
           </a:p>
         </p:txBody>
       </p:sp>
